--- a/docs/to_fix_images.pptx
+++ b/docs/to_fix_images.pptx
@@ -105,6 +105,11 @@
       </a:defRPr>
     </a:lvl9pPr>
   </p:defaultTextStyle>
+  <p:extLst>
+    <p:ext uri="{EFAFB233-063F-42B5-8137-9DF3F51BA10A}">
+      <p15:sldGuideLst xmlns:p15="http://schemas.microsoft.com/office/powerpoint/2012/main"/>
+    </p:ext>
+  </p:extLst>
 </p:presentation>
 </file>
 
@@ -255,7 +260,7 @@
           <a:p>
             <a:fld id="{4C798DA1-E2C1-4AB4-8A3F-A45CA7137CE8}" type="datetimeFigureOut">
               <a:rPr kumimoji="1" lang="ja-JP" altLang="en-US" smtClean="0"/>
-              <a:t>2026/9/28</a:t>
+              <a:t>2026/10/11</a:t>
             </a:fld>
             <a:endParaRPr kumimoji="1" lang="ja-JP" altLang="en-US"/>
           </a:p>
@@ -485,7 +490,7 @@
           <a:p>
             <a:fld id="{4C798DA1-E2C1-4AB4-8A3F-A45CA7137CE8}" type="datetimeFigureOut">
               <a:rPr kumimoji="1" lang="ja-JP" altLang="en-US" smtClean="0"/>
-              <a:t>2026/9/28</a:t>
+              <a:t>2026/10/11</a:t>
             </a:fld>
             <a:endParaRPr kumimoji="1" lang="ja-JP" altLang="en-US"/>
           </a:p>
@@ -725,7 +730,7 @@
           <a:p>
             <a:fld id="{4C798DA1-E2C1-4AB4-8A3F-A45CA7137CE8}" type="datetimeFigureOut">
               <a:rPr kumimoji="1" lang="ja-JP" altLang="en-US" smtClean="0"/>
-              <a:t>2026/9/28</a:t>
+              <a:t>2026/10/11</a:t>
             </a:fld>
             <a:endParaRPr kumimoji="1" lang="ja-JP" altLang="en-US"/>
           </a:p>
@@ -955,7 +960,7 @@
           <a:p>
             <a:fld id="{4C798DA1-E2C1-4AB4-8A3F-A45CA7137CE8}" type="datetimeFigureOut">
               <a:rPr kumimoji="1" lang="ja-JP" altLang="en-US" smtClean="0"/>
-              <a:t>2026/9/28</a:t>
+              <a:t>2026/10/11</a:t>
             </a:fld>
             <a:endParaRPr kumimoji="1" lang="ja-JP" altLang="en-US"/>
           </a:p>
@@ -1230,7 +1235,7 @@
           <a:p>
             <a:fld id="{4C798DA1-E2C1-4AB4-8A3F-A45CA7137CE8}" type="datetimeFigureOut">
               <a:rPr kumimoji="1" lang="ja-JP" altLang="en-US" smtClean="0"/>
-              <a:t>2026/9/28</a:t>
+              <a:t>2026/10/11</a:t>
             </a:fld>
             <a:endParaRPr kumimoji="1" lang="ja-JP" altLang="en-US"/>
           </a:p>
@@ -1559,7 +1564,7 @@
           <a:p>
             <a:fld id="{4C798DA1-E2C1-4AB4-8A3F-A45CA7137CE8}" type="datetimeFigureOut">
               <a:rPr kumimoji="1" lang="ja-JP" altLang="en-US" smtClean="0"/>
-              <a:t>2026/9/28</a:t>
+              <a:t>2026/10/11</a:t>
             </a:fld>
             <a:endParaRPr kumimoji="1" lang="ja-JP" altLang="en-US"/>
           </a:p>
@@ -2035,7 +2040,7 @@
           <a:p>
             <a:fld id="{4C798DA1-E2C1-4AB4-8A3F-A45CA7137CE8}" type="datetimeFigureOut">
               <a:rPr kumimoji="1" lang="ja-JP" altLang="en-US" smtClean="0"/>
-              <a:t>2026/9/28</a:t>
+              <a:t>2026/10/11</a:t>
             </a:fld>
             <a:endParaRPr kumimoji="1" lang="ja-JP" altLang="en-US"/>
           </a:p>
@@ -2176,7 +2181,7 @@
           <a:p>
             <a:fld id="{4C798DA1-E2C1-4AB4-8A3F-A45CA7137CE8}" type="datetimeFigureOut">
               <a:rPr kumimoji="1" lang="ja-JP" altLang="en-US" smtClean="0"/>
-              <a:t>2026/9/28</a:t>
+              <a:t>2026/10/11</a:t>
             </a:fld>
             <a:endParaRPr kumimoji="1" lang="ja-JP" altLang="en-US"/>
           </a:p>
@@ -2289,7 +2294,7 @@
           <a:p>
             <a:fld id="{4C798DA1-E2C1-4AB4-8A3F-A45CA7137CE8}" type="datetimeFigureOut">
               <a:rPr kumimoji="1" lang="ja-JP" altLang="en-US" smtClean="0"/>
-              <a:t>2026/9/28</a:t>
+              <a:t>2026/10/11</a:t>
             </a:fld>
             <a:endParaRPr kumimoji="1" lang="ja-JP" altLang="en-US"/>
           </a:p>
@@ -2632,7 +2637,7 @@
           <a:p>
             <a:fld id="{4C798DA1-E2C1-4AB4-8A3F-A45CA7137CE8}" type="datetimeFigureOut">
               <a:rPr kumimoji="1" lang="ja-JP" altLang="en-US" smtClean="0"/>
-              <a:t>2026/9/28</a:t>
+              <a:t>2026/10/11</a:t>
             </a:fld>
             <a:endParaRPr kumimoji="1" lang="ja-JP" altLang="en-US"/>
           </a:p>
@@ -2920,7 +2925,7 @@
           <a:p>
             <a:fld id="{4C798DA1-E2C1-4AB4-8A3F-A45CA7137CE8}" type="datetimeFigureOut">
               <a:rPr kumimoji="1" lang="ja-JP" altLang="en-US" smtClean="0"/>
-              <a:t>2026/9/28</a:t>
+              <a:t>2026/10/11</a:t>
             </a:fld>
             <a:endParaRPr kumimoji="1" lang="ja-JP" altLang="en-US"/>
           </a:p>
@@ -3193,7 +3198,7 @@
           <a:p>
             <a:fld id="{4C798DA1-E2C1-4AB4-8A3F-A45CA7137CE8}" type="datetimeFigureOut">
               <a:rPr kumimoji="1" lang="ja-JP" altLang="en-US" smtClean="0"/>
-              <a:t>2026/9/28</a:t>
+              <a:t>2026/10/11</a:t>
             </a:fld>
             <a:endParaRPr kumimoji="1" lang="ja-JP" altLang="en-US"/>
           </a:p>
@@ -3748,10 +3753,10 @@
       </p:grpSpPr>
       <p:grpSp>
         <p:nvGrpSpPr>
-          <p:cNvPr id="7" name="グループ化 6">
-            <a:extLst>
-              <a:ext uri="{FF2B5EF4-FFF2-40B4-BE49-F238E27FC236}">
-                <a16:creationId xmlns:a16="http://schemas.microsoft.com/office/drawing/2014/main" id="{BE06750D-C0E8-54B0-19D8-B6FC0DE8BC04}"/>
+          <p:cNvPr id="5" name="グループ化 4">
+            <a:extLst>
+              <a:ext uri="{FF2B5EF4-FFF2-40B4-BE49-F238E27FC236}">
+                <a16:creationId xmlns:a16="http://schemas.microsoft.com/office/drawing/2014/main" id="{E395BFF7-94FD-6C88-0ED8-063B91DDB0AE}"/>
               </a:ext>
             </a:extLst>
           </p:cNvPr>
@@ -3766,48 +3771,118 @@
             <a:chExt cx="4229690" cy="4991797"/>
           </a:xfrm>
         </p:grpSpPr>
-        <p:pic>
-          <p:nvPicPr>
-            <p:cNvPr id="3" name="図 2">
+        <p:grpSp>
+          <p:nvGrpSpPr>
+            <p:cNvPr id="7" name="グループ化 6">
               <a:extLst>
                 <a:ext uri="{FF2B5EF4-FFF2-40B4-BE49-F238E27FC236}">
-                  <a16:creationId xmlns:a16="http://schemas.microsoft.com/office/drawing/2014/main" id="{33E61A96-9177-20CA-F8FE-1707D1302C09}"/>
+                  <a16:creationId xmlns:a16="http://schemas.microsoft.com/office/drawing/2014/main" id="{BE06750D-C0E8-54B0-19D8-B6FC0DE8BC04}"/>
                 </a:ext>
               </a:extLst>
             </p:cNvPr>
-            <p:cNvPicPr>
-              <a:picLocks noChangeAspect="1"/>
-            </p:cNvPicPr>
+            <p:cNvGrpSpPr/>
             <p:nvPr/>
-          </p:nvPicPr>
-          <p:blipFill>
-            <a:blip r:embed="rId2">
-              <a:extLst>
-                <a:ext uri="{28A0092B-C50C-407E-A947-70E740481C1C}">
-                  <a14:useLocalDpi xmlns:a14="http://schemas.microsoft.com/office/drawing/2010/main" val="0"/>
-                </a:ext>
-              </a:extLst>
-            </a:blip>
-            <a:stretch>
-              <a:fillRect/>
-            </a:stretch>
-          </p:blipFill>
-          <p:spPr>
+          </p:nvGrpSpPr>
+          <p:grpSpPr>
             <a:xfrm>
               <a:off x="3981155" y="933101"/>
               <a:ext cx="4229690" cy="4991797"/>
+              <a:chOff x="3981155" y="933101"/>
+              <a:chExt cx="4229690" cy="4991797"/>
             </a:xfrm>
-            <a:prstGeom prst="rect">
-              <a:avLst/>
-            </a:prstGeom>
-          </p:spPr>
-        </p:pic>
+          </p:grpSpPr>
+          <p:pic>
+            <p:nvPicPr>
+              <p:cNvPr id="3" name="図 2">
+                <a:extLst>
+                  <a:ext uri="{FF2B5EF4-FFF2-40B4-BE49-F238E27FC236}">
+                    <a16:creationId xmlns:a16="http://schemas.microsoft.com/office/drawing/2014/main" id="{33E61A96-9177-20CA-F8FE-1707D1302C09}"/>
+                  </a:ext>
+                </a:extLst>
+              </p:cNvPr>
+              <p:cNvPicPr>
+                <a:picLocks noChangeAspect="1"/>
+              </p:cNvPicPr>
+              <p:nvPr/>
+            </p:nvPicPr>
+            <p:blipFill>
+              <a:blip r:embed="rId2">
+                <a:extLst>
+                  <a:ext uri="{28A0092B-C50C-407E-A947-70E740481C1C}">
+                    <a14:useLocalDpi xmlns:a14="http://schemas.microsoft.com/office/drawing/2010/main" val="0"/>
+                  </a:ext>
+                </a:extLst>
+              </a:blip>
+              <a:stretch>
+                <a:fillRect/>
+              </a:stretch>
+            </p:blipFill>
+            <p:spPr>
+              <a:xfrm>
+                <a:off x="3981155" y="933101"/>
+                <a:ext cx="4229690" cy="4991797"/>
+              </a:xfrm>
+              <a:prstGeom prst="rect">
+                <a:avLst/>
+              </a:prstGeom>
+            </p:spPr>
+          </p:pic>
+          <p:sp>
+            <p:nvSpPr>
+              <p:cNvPr id="6" name="正方形/長方形 5">
+                <a:extLst>
+                  <a:ext uri="{FF2B5EF4-FFF2-40B4-BE49-F238E27FC236}">
+                    <a16:creationId xmlns:a16="http://schemas.microsoft.com/office/drawing/2014/main" id="{600D48FA-0B94-768C-F0A0-5136F4F8EA56}"/>
+                  </a:ext>
+                </a:extLst>
+              </p:cNvPr>
+              <p:cNvSpPr/>
+              <p:nvPr/>
+            </p:nvSpPr>
+            <p:spPr>
+              <a:xfrm>
+                <a:off x="6740435" y="1802676"/>
+                <a:ext cx="574765" cy="217714"/>
+              </a:xfrm>
+              <a:prstGeom prst="rect">
+                <a:avLst/>
+              </a:prstGeom>
+              <a:ln>
+                <a:noFill/>
+              </a:ln>
+            </p:spPr>
+            <p:style>
+              <a:lnRef idx="2">
+                <a:schemeClr val="dk1">
+                  <a:shade val="15000"/>
+                </a:schemeClr>
+              </a:lnRef>
+              <a:fillRef idx="1">
+                <a:schemeClr val="dk1"/>
+              </a:fillRef>
+              <a:effectRef idx="0">
+                <a:schemeClr val="dk1"/>
+              </a:effectRef>
+              <a:fontRef idx="minor">
+                <a:schemeClr val="lt1"/>
+              </a:fontRef>
+            </p:style>
+            <p:txBody>
+              <a:bodyPr rtlCol="0" anchor="ctr"/>
+              <a:lstStyle/>
+              <a:p>
+                <a:pPr algn="ctr"/>
+                <a:endParaRPr kumimoji="1" lang="ja-JP" altLang="en-US" dirty="0"/>
+              </a:p>
+            </p:txBody>
+          </p:sp>
+        </p:grpSp>
         <p:sp>
           <p:nvSpPr>
-            <p:cNvPr id="6" name="正方形/長方形 5">
+            <p:cNvPr id="4" name="正方形/長方形 3">
               <a:extLst>
                 <a:ext uri="{FF2B5EF4-FFF2-40B4-BE49-F238E27FC236}">
-                  <a16:creationId xmlns:a16="http://schemas.microsoft.com/office/drawing/2014/main" id="{600D48FA-0B94-768C-F0A0-5136F4F8EA56}"/>
+                  <a16:creationId xmlns:a16="http://schemas.microsoft.com/office/drawing/2014/main" id="{CEFC4650-2AA4-F40A-DBB7-D6EC25F552D4}"/>
                 </a:ext>
               </a:extLst>
             </p:cNvPr>
@@ -3816,8 +3891,8 @@
           </p:nvSpPr>
           <p:spPr>
             <a:xfrm>
-              <a:off x="6740435" y="1802676"/>
-              <a:ext cx="574765" cy="217714"/>
+              <a:off x="4614585" y="3621144"/>
+              <a:ext cx="267381" cy="199188"/>
             </a:xfrm>
             <a:prstGeom prst="rect">
               <a:avLst/>
